--- a/deliverables/chem-u02/SHULL_CHEM_Slides_U02_S02.4_Static.pptx
+++ b/deliverables/chem-u02/SHULL_CHEM_Slides_U02_S02.4_Static.pptx
@@ -610,17 +610,17 @@
           <a:lstStyle/>
           <a:p>
             <a:r>
-              <a:t>MERGED slide (was two: Na+ orbitals and Cl- orbitals). Na loses its 3s1, leaving the neon configuration; Cl's added electron goes into the open 3p spot, not a new level, and matches argon. Click build replaces the static figure: sodium builds first, then the chlorine build covers it in the same slot (the 20-content-slide cap leaves no room for a second slide). The state line under each diagram gives the plain, large charge so the minus is legible. The static PNG chem_u02_s2.4_na_cl_ions.png stays on disk for print. Do not yet say why these charges: the rule comes at the end of the section.</a:t>
-            </a:r>
-          </a:p>
-          <a:p>
-            <a:r>
-              <a:t>STATIC FINAL STATE: print and handout copy, no animation. This slide shows the final state of the click build (Na); the animated deck shows it one click at a time.</a:t>
-            </a:r>
-          </a:p>
-          <a:p>
-            <a:r>
-              <a:t>STATIC FINAL STATE: print and handout copy, no animation. This slide shows the final state of the click build (Cl); the animated deck shows it one click at a time.</a:t>
+              <a:t>MERGED slide (was two: Na+ orbitals and Cl- orbitals). Na loses its 3s1, leaving the neon configuration; Cl's added electron goes into the open 3p spot, not a new level, and matches argon. The slide shows the Na+ diagram above the Cl- diagram. The state line under each diagram gives the plain, large charge so the minus is legible. Do not yet say why these charges: the rule comes at the end of the section.</a:t>
+            </a:r>
+          </a:p>
+          <a:p>
+            <a:r>
+              <a:t>STATIC FINAL STATE: print and handout copy, no animation. This slide shows the final state of the build (Na and Cl).</a:t>
+            </a:r>
+          </a:p>
+          <a:p>
+            <a:r>
+              <a:t>Animated version: SHULL_CHEM_Slides_U02_S02.4.pptx has the click-by-click build.</a:t>
             </a:r>
           </a:p>
         </p:txBody>
@@ -970,12 +970,17 @@
           <a:lstStyle/>
           <a:p>
             <a:r>
-              <a:t>Fe 26, Fe2+ 24 [Ar]3d6, Fe3+ 23 [Ar]3d5. Present 3d5 as an observed electron count, not proof of a cause. Click build replaces the static figure: one slide carries Fe, Fe2+ and Fe3+ (the 4s arrows leave first, then one 3d). Click 3 passes through Fe+ (25 electrons), named on the slide so no species goes unlabelled. The static PNG chem_u02_s2.4_fe_ions_orbitals.png stays on disk for print.</a:t>
-            </a:r>
-          </a:p>
-          <a:p>
-            <a:r>
-              <a:t>STATIC FINAL STATE: print and handout copy, no animation. This slide shows the final state of the click build (Fe); the animated deck shows it one click at a time.</a:t>
+              <a:t>Fe 26, Fe2+ 24 [Ar]3d6, Fe3+ 23 [Ar]3d5. Present 3d5 as an observed electron count, not proof of a cause. This slide shows the finished Fe3+ diagram. The path to it: the 4s electrons leave first (Fe+ with 25 electrons, then Fe2+), then one 3d electron (Fe3+); only the end state is drawn here.</a:t>
+            </a:r>
+          </a:p>
+          <a:p>
+            <a:r>
+              <a:t>STATIC FINAL STATE: print and handout copy, no animation. This slide shows the final state of the build (Fe).</a:t>
+            </a:r>
+          </a:p>
+          <a:p>
+            <a:r>
+              <a:t>Animated version: SHULL_CHEM_Slides_U02_S02.4.pptx has the click-by-click build.</a:t>
             </a:r>
           </a:p>
         </p:txBody>
@@ -1237,12 +1242,17 @@
           <a:lstStyle/>
           <a:p>
             <a:r>
-              <a:t>NEW. Closing synthesis, step 1: Ca walk-through in four moves: count (2 valence), move (lose 2; gaining 6 is more), result ([Ar], 18 electrons), charge (20 protons minus 18 electrons = 2+). Valence-electron reasoning only. Do not teach ionization energy; Unit 3 (U3.4, U3.7) explains the energy side. Scope boundary set by Matt 2026-10-04; DECISIONS.md not changed. Avoid 'wants' or 'needs' language for atoms. The picture slot holds the Ca click build (valence arrows highlighted, then removed one per click).</a:t>
-            </a:r>
-          </a:p>
-          <a:p>
-            <a:r>
-              <a:t>STATIC FINAL STATE: print and handout copy, no animation. This slide shows the final state of the click build (Ca); the animated deck shows it one click at a time.</a:t>
+              <a:t>NEW. Closing synthesis, step 1: Ca walk-through in four moves: count (2 valence), move (lose 2; gaining 6 is more), result ([Ar], 18 electrons), charge (20 protons minus 18 electrons = 2+). Valence-electron reasoning only. Do not teach ionization energy; Unit 3 (U3.4, U3.7) explains the energy side. Scope boundary set by Matt 2026-10-04; DECISIONS.md not changed. Avoid 'wants' or 'needs' language for atoms. The picture slot shows the finished Ca2+ diagram (the two valence arrows removed).</a:t>
+            </a:r>
+          </a:p>
+          <a:p>
+            <a:r>
+              <a:t>STATIC FINAL STATE: print and handout copy, no animation. This slide shows the final state of the build (Ca).</a:t>
+            </a:r>
+          </a:p>
+          <a:p>
+            <a:r>
+              <a:t>Animated version: SHULL_CHEM_Slides_U02_S02.4.pptx has the click-by-click build.</a:t>
             </a:r>
           </a:p>
         </p:txBody>
@@ -1592,12 +1602,17 @@
           <a:lstStyle/>
           <a:p>
             <a:r>
-              <a:t>Mg: 12 e to 10, Mg2+, [Ne]. Al: 13 to 10, Al3+, [Ne]. S: 16 to 18, S2-, [Ar]. Br: 35 to 36, Br-, [Kr] (3d10 already full). All numbers re-added in the figure script assertions. Anion charges are written plain (2−, 1−) on the slide for legibility. Same pattern, same rule: Mg2+ and S2- were the old example's ions. The picture slot holds a click build for S only (two down arrows added); Mg, Al and Br stay in the text.</a:t>
-            </a:r>
-          </a:p>
-          <a:p>
-            <a:r>
-              <a:t>STATIC FINAL STATE: print and handout copy, no animation. This slide shows the final state of the click build (S); the animated deck shows it one click at a time.</a:t>
+              <a:t>Mg: 12 e to 10, Mg2+, [Ne]. Al: 13 to 10, Al3+, [Ne]. S: 16 to 18, S2-, [Ar]. Br: 35 to 36, Br-, [Kr] (3d10 already full). All numbers re-added in the figure script assertions. Anion charges are written plain (2−, 1−) on the slide for legibility. Same pattern, same rule: Mg2+ and S2- were the old example's ions. The picture slot shows the S2- diagram (two down arrows added); Mg, Al and Br stay in the text.</a:t>
+            </a:r>
+          </a:p>
+          <a:p>
+            <a:r>
+              <a:t>STATIC FINAL STATE: print and handout copy, no animation. This slide shows the final state of the build (S).</a:t>
+            </a:r>
+          </a:p>
+          <a:p>
+            <a:r>
+              <a:t>Animated version: SHULL_CHEM_Slides_U02_S02.4.pptx has the click-by-click build.</a:t>
             </a:r>
           </a:p>
         </p:txBody>
@@ -15206,7 +15221,16 @@
                   </a:solidFill>
                   <a:latin typeface="Trade Gothic Next"/>
                 </a:rPr>
-                <a:t>Cl ion</a:t>
+                <a:t>Cl</a:t>
+              </a:r>
+              <a:r>
+                <a:rPr sz="1800" b="1" baseline="30000">
+                  <a:solidFill>
+                    <a:srgbClr val="14161B"/>
+                  </a:solidFill>
+                  <a:latin typeface="Trade Gothic Next"/>
+                </a:rPr>
+                <a:t>−</a:t>
               </a:r>
             </a:p>
             <a:p>
